--- a/yunqi-2026-pai-forum/docs/洞察一页-07-广告系统的智能演进：小米广告算法走向LLM4Rec的实践.pptx
+++ b/yunqi-2026-pai-forum/docs/洞察一页-07-广告系统的智能演进：小米广告算法走向LLM4Rec的实践.pptx
@@ -3141,7 +3141,7 @@
         <p:spPr>
           <a:xfrm>
             <a:off x="0" y="0"/>
-            <a:ext cx="12191695" cy="1051560"/>
+            <a:ext cx="12191695" cy="1097280"/>
           </a:xfrm>
           <a:prstGeom prst="rect">
             <a:avLst/>
@@ -3183,8 +3183,8 @@
         </p:nvSpPr>
         <p:spPr>
           <a:xfrm>
-            <a:off x="365760" y="146304"/>
-            <a:ext cx="11430000" cy="274320"/>
+            <a:off x="320040" y="91440"/>
+            <a:ext cx="11521440" cy="237744"/>
           </a:xfrm>
           <a:prstGeom prst="rect">
             <a:avLst/>
@@ -3199,7 +3199,7 @@
           <a:p>
             <a:pPr algn="l"/>
             <a:r>
-              <a:rPr sz="1300" b="0">
+              <a:rPr sz="1200" b="0">
                 <a:solidFill>
                   <a:srgbClr val="6B6B6B"/>
                 </a:solidFill>
@@ -3219,8 +3219,8 @@
         </p:nvSpPr>
         <p:spPr>
           <a:xfrm>
-            <a:off x="365760" y="420624"/>
-            <a:ext cx="11430000" cy="502920"/>
+            <a:off x="320040" y="347472"/>
+            <a:ext cx="11521440" cy="658368"/>
           </a:xfrm>
           <a:prstGeom prst="rect">
             <a:avLst/>
@@ -3235,14 +3235,14 @@
           <a:p>
             <a:pPr algn="l"/>
             <a:r>
-              <a:rPr sz="2000" b="1">
+              <a:rPr sz="1600" b="1">
                 <a:solidFill>
                   <a:srgbClr val="1A1A1A"/>
                 </a:solidFill>
                 <a:latin typeface="Microsoft YaHei"/>
                 <a:ea typeface="Microsoft YaHei"/>
               </a:rPr>
-              <a:t>洞察：小米路径证明：3个季度ARPU&gt;+8%的主要杠杆是Torch底座、长序列与在线学习，而非单点结…</a:t>
+              <a:t>洞察：小米路径证明：3个季度ARPU&gt;+8%的主要杠杆是Torch底座、长序列与在线学习，而非单点结构创新。</a:t>
             </a:r>
           </a:p>
         </p:txBody>
@@ -3255,8 +3255,8 @@
         </p:nvSpPr>
         <p:spPr>
           <a:xfrm>
-            <a:off x="320040" y="1207008"/>
-            <a:ext cx="11521440" cy="502920"/>
+            <a:off x="274320" y="1207008"/>
+            <a:ext cx="11612880" cy="749808"/>
           </a:xfrm>
           <a:prstGeom prst="rect">
             <a:avLst/>
@@ -3300,8 +3300,8 @@
         </p:nvSpPr>
         <p:spPr>
           <a:xfrm>
-            <a:off x="457200" y="1298448"/>
-            <a:ext cx="11247120" cy="365760"/>
+            <a:off x="411480" y="1261872"/>
+            <a:ext cx="11338560" cy="640080"/>
           </a:xfrm>
           <a:prstGeom prst="rect">
             <a:avLst/>
@@ -3316,14 +3316,14 @@
           <a:p>
             <a:pPr algn="l"/>
             <a:r>
-              <a:rPr sz="1300" b="1">
+              <a:rPr sz="1200" b="1">
                 <a:solidFill>
                   <a:srgbClr val="1A1A1A"/>
                 </a:solidFill>
                 <a:latin typeface="Microsoft YaHei"/>
                 <a:ea typeface="Microsoft YaHei"/>
               </a:rPr>
-              <a:t>一句话判断：吴睿泽分享小米应用商店广告在约3个季度内通过底座升级而非单纯调模，实现ARPU提升超过8个百分点的实践。路径是训推全面切Torch、端到端长序列、流式在线学习，并推进推荐Scaling Law与生成式Ultra-HST…</a:t>
+              <a:t>一句话判断：吴睿泽分享小米应用商店广告在约3个季度内通过底座升级而非单纯调模，实现ARPU提升超过8个百分点的实践。路径是训推全面切Torch、端到端长序列、流式在线学习，并推进推荐Scaling Law与生成式Ultra-HSTU。</a:t>
             </a:r>
           </a:p>
         </p:txBody>
@@ -3336,8 +3336,8 @@
         </p:nvSpPr>
         <p:spPr>
           <a:xfrm>
-            <a:off x="320040" y="1874519"/>
-            <a:ext cx="3703320" cy="2606040"/>
+            <a:off x="274320" y="2084831"/>
+            <a:ext cx="3749039" cy="2267712"/>
           </a:xfrm>
           <a:prstGeom prst="rect">
             <a:avLst/>
@@ -3381,8 +3381,8 @@
         </p:nvSpPr>
         <p:spPr>
           <a:xfrm>
-            <a:off x="457200" y="2011679"/>
-            <a:ext cx="3429000" cy="320040"/>
+            <a:off x="402336" y="2176271"/>
+            <a:ext cx="3493007" cy="292608"/>
           </a:xfrm>
           <a:prstGeom prst="rect">
             <a:avLst/>
@@ -3397,14 +3397,14 @@
           <a:p>
             <a:pPr algn="l"/>
             <a:r>
-              <a:rPr sz="1500" b="1">
+              <a:rPr sz="1400" b="1">
                 <a:solidFill>
                   <a:srgbClr val="8B1A2B"/>
                 </a:solidFill>
                 <a:latin typeface="Microsoft YaHei"/>
                 <a:ea typeface="Microsoft YaHei"/>
               </a:rPr>
-              <a:t>01  三季业务结果：不只是模型优化</a:t>
+              <a:t>01  不只是模型优化</a:t>
             </a:r>
           </a:p>
         </p:txBody>
@@ -3417,8 +3417,8 @@
         </p:nvSpPr>
         <p:spPr>
           <a:xfrm>
-            <a:off x="484632" y="2377439"/>
-            <a:ext cx="3374136" cy="1965960"/>
+            <a:off x="402336" y="2487167"/>
+            <a:ext cx="3493007" cy="1764792"/>
           </a:xfrm>
           <a:prstGeom prst="rect">
             <a:avLst/>
@@ -3433,28 +3433,45 @@
           <a:p>
             <a:pPr algn="l">
               <a:spcAft>
-                <a:spcPts val="400"/>
+                <a:spcPts val="200"/>
               </a:spcAft>
             </a:pPr>
             <a:r>
-              <a:rPr sz="1200" b="1">
+              <a:rPr sz="1100" b="1">
                 <a:solidFill>
                   <a:srgbClr val="1A1A1A"/>
                 </a:solidFill>
                 <a:latin typeface="Microsoft YaHei"/>
                 <a:ea typeface="Microsoft YaHei"/>
               </a:rPr>
-              <a:t>2026Q1–Q3小米应用商店广告：ARPU提升&gt;8%、GAUC提升&gt;2%；稠密参…</a:t>
+              <a:t>大盘增益叙事应绑定「底座能力跃迁」而不是结构刷榜</a:t>
             </a:r>
           </a:p>
           <a:p>
             <a:pPr algn="l">
               <a:spcAft>
-                <a:spcPts val="400"/>
+                <a:spcPts val="200"/>
               </a:spcAft>
             </a:pPr>
             <a:r>
-              <a:rPr sz="1200" b="0">
+              <a:rPr sz="1100" b="0">
+                <a:solidFill>
+                  <a:srgbClr val="4A4A4A"/>
+                </a:solidFill>
+                <a:latin typeface="Microsoft YaHei"/>
+                <a:ea typeface="Microsoft YaHei"/>
+              </a:rPr>
+              <a:t>• 2026Q1–Q3小米应用商店广告：ARPU提升&gt;8%、GAUC提升&gt;2%；稠密参数提升约10倍并超过1B。</a:t>
+            </a:r>
+          </a:p>
+          <a:p>
+            <a:pPr algn="l">
+              <a:spcAft>
+                <a:spcPts val="200"/>
+              </a:spcAft>
+            </a:pPr>
+            <a:r>
+              <a:rPr sz="1100" b="0">
                 <a:solidFill>
                   <a:srgbClr val="4A4A4A"/>
                 </a:solidFill>
@@ -3467,35 +3484,18 @@
           <a:p>
             <a:pPr algn="l">
               <a:spcAft>
-                <a:spcPts val="400"/>
+                <a:spcPts val="200"/>
               </a:spcAft>
             </a:pPr>
             <a:r>
-              <a:rPr sz="1200" b="0">
+              <a:rPr sz="1100" b="0">
                 <a:solidFill>
                   <a:srgbClr val="4A4A4A"/>
                 </a:solidFill>
                 <a:latin typeface="Microsoft YaHei"/>
                 <a:ea typeface="Microsoft YaHei"/>
               </a:rPr>
-              <a:t>• Q1–Q2：端到端长序列（ETA/SCTA/MixFormer多版本），2K序列建模；流式在线学习（Kafka流式训练+增量更新）。</a:t>
-            </a:r>
-          </a:p>
-          <a:p>
-            <a:pPr algn="l">
-              <a:spcAft>
-                <a:spcPts val="400"/>
-              </a:spcAft>
-            </a:pPr>
-            <a:r>
-              <a:rPr sz="1200" b="0">
-                <a:solidFill>
-                  <a:srgbClr val="4A4A4A"/>
-                </a:solidFill>
-                <a:latin typeface="Microsoft YaHei"/>
-                <a:ea typeface="Microsoft YaHei"/>
-              </a:rPr>
-              <a:t>• Q3–Q4方向：推荐Scaling Law与生成式（HSTU全量落地、多模预训练表征、LLM4Rec工程底座预研）。</a:t>
+              <a:t>• Q1–Q2：端到端长序列（ETA/SCTA/MixFormer多版本），2K序列建模</a:t>
             </a:r>
           </a:p>
         </p:txBody>
@@ -3508,8 +3508,8 @@
         </p:nvSpPr>
         <p:spPr>
           <a:xfrm>
-            <a:off x="4224528" y="1874519"/>
-            <a:ext cx="3703320" cy="2606040"/>
+            <a:off x="4187951" y="2084831"/>
+            <a:ext cx="3749039" cy="2267712"/>
           </a:xfrm>
           <a:prstGeom prst="rect">
             <a:avLst/>
@@ -3553,8 +3553,8 @@
         </p:nvSpPr>
         <p:spPr>
           <a:xfrm>
-            <a:off x="4361688" y="2011679"/>
-            <a:ext cx="3429000" cy="320040"/>
+            <a:off x="4315967" y="2176271"/>
+            <a:ext cx="3493007" cy="292608"/>
           </a:xfrm>
           <a:prstGeom prst="rect">
             <a:avLst/>
@@ -3569,14 +3569,14 @@
           <a:p>
             <a:pPr algn="l"/>
             <a:r>
-              <a:rPr sz="1500" b="1">
+              <a:rPr sz="1400" b="1">
                 <a:solidFill>
                   <a:srgbClr val="8B1A2B"/>
                 </a:solidFill>
                 <a:latin typeface="Microsoft YaHei"/>
                 <a:ea typeface="Microsoft YaHei"/>
               </a:rPr>
-              <a:t>02  联合共建：推荐底座升级为可规模…</a:t>
+              <a:t>02  推荐底座升级为可规模/可序列/可实时</a:t>
             </a:r>
           </a:p>
         </p:txBody>
@@ -3589,8 +3589,8 @@
         </p:nvSpPr>
         <p:spPr>
           <a:xfrm>
-            <a:off x="4389120" y="2377439"/>
-            <a:ext cx="3374136" cy="1965960"/>
+            <a:off x="4315967" y="2487167"/>
+            <a:ext cx="3493007" cy="1764792"/>
           </a:xfrm>
           <a:prstGeom prst="rect">
             <a:avLst/>
@@ -3605,28 +3605,45 @@
           <a:p>
             <a:pPr algn="l">
               <a:spcAft>
-                <a:spcPts val="400"/>
+                <a:spcPts val="200"/>
               </a:spcAft>
             </a:pPr>
             <a:r>
-              <a:rPr sz="1200" b="1">
+              <a:rPr sz="1100" b="1">
                 <a:solidFill>
                   <a:srgbClr val="1A1A1A"/>
                 </a:solidFill>
                 <a:latin typeface="Microsoft YaHei"/>
                 <a:ea typeface="Microsoft YaHei"/>
               </a:rPr>
-              <a:t>小米应用商店诉求：要的是底座级升级，而不是又一次常规调模。</a:t>
+              <a:t>推荐底座三问对标：显存能不能撑大规模稀疏、序列能不能做到2K端到端、更新能不能到分钟级</a:t>
             </a:r>
           </a:p>
           <a:p>
             <a:pPr algn="l">
               <a:spcAft>
-                <a:spcPts val="400"/>
+                <a:spcPts val="200"/>
               </a:spcAft>
             </a:pPr>
             <a:r>
-              <a:rPr sz="1200" b="0">
+              <a:rPr sz="1100" b="0">
+                <a:solidFill>
+                  <a:srgbClr val="4A4A4A"/>
+                </a:solidFill>
+                <a:latin typeface="Microsoft YaHei"/>
+                <a:ea typeface="Microsoft YaHei"/>
+              </a:rPr>
+              <a:t>• 小米应用商店诉求：要的是底座级升级，而不是又一次常规调模。</a:t>
+            </a:r>
+          </a:p>
+          <a:p>
+            <a:pPr algn="l">
+              <a:spcAft>
+                <a:spcPts val="200"/>
+              </a:spcAft>
+            </a:pPr>
+            <a:r>
+              <a:rPr sz="1100" b="0">
                 <a:solidFill>
                   <a:srgbClr val="4A4A4A"/>
                 </a:solidFill>
@@ -3639,11 +3656,11 @@
           <a:p>
             <a:pPr algn="l">
               <a:spcAft>
-                <a:spcPts val="400"/>
+                <a:spcPts val="200"/>
               </a:spcAft>
             </a:pPr>
             <a:r>
-              <a:rPr sz="1200" b="0">
+              <a:rPr sz="1100" b="0">
                 <a:solidFill>
                   <a:srgbClr val="4A4A4A"/>
                 </a:solidFill>
@@ -3653,23 +3670,6 @@
               <a:t>• 长序列加速：PAI辅助多级Item KV Cache与INT8量化。</a:t>
             </a:r>
           </a:p>
-          <a:p>
-            <a:pPr algn="l">
-              <a:spcAft>
-                <a:spcPts val="400"/>
-              </a:spcAft>
-            </a:pPr>
-            <a:r>
-              <a:rPr sz="1200" b="0">
-                <a:solidFill>
-                  <a:srgbClr val="4A4A4A"/>
-                </a:solidFill>
-                <a:latin typeface="Microsoft YaHei"/>
-                <a:ea typeface="Microsoft YaHei"/>
-              </a:rPr>
-              <a:t>• 在线学习：TorchEasyRec；离线PAI-TorchEasyRec（Dense: SCTA/MixFormer+FlashAtt…</a:t>
-            </a:r>
-          </a:p>
         </p:txBody>
       </p:sp>
       <p:sp>
@@ -3680,8 +3680,8 @@
         </p:nvSpPr>
         <p:spPr>
           <a:xfrm>
-            <a:off x="8129016" y="1874519"/>
-            <a:ext cx="3703320" cy="2606040"/>
+            <a:off x="8101582" y="2084831"/>
+            <a:ext cx="3749039" cy="2267712"/>
           </a:xfrm>
           <a:prstGeom prst="rect">
             <a:avLst/>
@@ -3725,8 +3725,8 @@
         </p:nvSpPr>
         <p:spPr>
           <a:xfrm>
-            <a:off x="8266176" y="2011679"/>
-            <a:ext cx="3429000" cy="320040"/>
+            <a:off x="8229598" y="2176271"/>
+            <a:ext cx="3493007" cy="292608"/>
           </a:xfrm>
           <a:prstGeom prst="rect">
             <a:avLst/>
@@ -3741,14 +3741,14 @@
           <a:p>
             <a:pPr algn="l"/>
             <a:r>
-              <a:rPr sz="1500" b="1">
+              <a:rPr sz="1400" b="1">
                 <a:solidFill>
                   <a:srgbClr val="8B1A2B"/>
                 </a:solidFill>
                 <a:latin typeface="Microsoft YaHei"/>
                 <a:ea typeface="Microsoft YaHei"/>
               </a:rPr>
-              <a:t>03  下一站LLM4Rec：Scal…</a:t>
+              <a:t>03  下一站LLM4Rec</a:t>
             </a:r>
           </a:p>
         </p:txBody>
@@ -3761,8 +3761,8 @@
         </p:nvSpPr>
         <p:spPr>
           <a:xfrm>
-            <a:off x="8293608" y="2377439"/>
-            <a:ext cx="3374136" cy="1965960"/>
+            <a:off x="8229598" y="2487167"/>
+            <a:ext cx="3493007" cy="1764792"/>
           </a:xfrm>
           <a:prstGeom prst="rect">
             <a:avLst/>
@@ -3777,28 +3777,45 @@
           <a:p>
             <a:pPr algn="l">
               <a:spcAft>
-                <a:spcPts val="400"/>
+                <a:spcPts val="200"/>
               </a:spcAft>
             </a:pPr>
             <a:r>
-              <a:rPr sz="1200" b="1">
+              <a:rPr sz="1100" b="1">
                 <a:solidFill>
                   <a:srgbClr val="1A1A1A"/>
                 </a:solidFill>
                 <a:latin typeface="Microsoft YaHei"/>
                 <a:ea typeface="Microsoft YaHei"/>
               </a:rPr>
-              <a:t>Scaling Law落地：非序列化扩参触顶；用多源长序列Scaling Up（更…</a:t>
+              <a:t>LLM4Rec不是换一个更大CTR模型，而是同时升级样本组织、生成式框架与语义ID召回</a:t>
             </a:r>
           </a:p>
           <a:p>
             <a:pPr algn="l">
               <a:spcAft>
-                <a:spcPts val="400"/>
+                <a:spcPts val="200"/>
               </a:spcAft>
             </a:pPr>
             <a:r>
-              <a:rPr sz="1200" b="0">
+              <a:rPr sz="1100" b="0">
+                <a:solidFill>
+                  <a:srgbClr val="4A4A4A"/>
+                </a:solidFill>
+                <a:latin typeface="Microsoft YaHei"/>
+                <a:ea typeface="Microsoft YaHei"/>
+              </a:rPr>
+              <a:t>• Scaling Law落地：非序列化扩参触顶</a:t>
+            </a:r>
+          </a:p>
+          <a:p>
+            <a:pPr algn="l">
+              <a:spcAft>
+                <a:spcPts val="200"/>
+              </a:spcAft>
+            </a:pPr>
+            <a:r>
+              <a:rPr sz="1100" b="0">
                 <a:solidFill>
                   <a:srgbClr val="4A4A4A"/>
                 </a:solidFill>
@@ -3811,11 +3828,11 @@
           <a:p>
             <a:pPr algn="l">
               <a:spcAft>
-                <a:spcPts val="400"/>
+                <a:spcPts val="200"/>
               </a:spcAft>
             </a:pPr>
             <a:r>
-              <a:rPr sz="1200" b="0">
+              <a:rPr sz="1100" b="0">
                 <a:solidFill>
                   <a:srgbClr val="4A4A4A"/>
                 </a:solidFill>
@@ -3825,23 +3842,6 @@
               <a:t>• 多模表征理解：广告ID海量、投放周期短、冷启样本少；用语义ID + 生成式召回，多模大模型内容编码直接生成候选。</a:t>
             </a:r>
           </a:p>
-          <a:p>
-            <a:pPr algn="l">
-              <a:spcAft>
-                <a:spcPts val="400"/>
-              </a:spcAft>
-            </a:pPr>
-            <a:r>
-              <a:rPr sz="1200" b="0">
-                <a:solidFill>
-                  <a:srgbClr val="4A4A4A"/>
-                </a:solidFill>
-                <a:latin typeface="Microsoft YaHei"/>
-                <a:ea typeface="Microsoft YaHei"/>
-              </a:rPr>
-              <a:t>• 共建底座：PAI-Rec能力体系、Dynamic Embedding、流式训练、多模表征、语义ID、HSTU类序列模型、生成式召回、F…</a:t>
-            </a:r>
-          </a:p>
         </p:txBody>
       </p:sp>
       <p:sp>
@@ -3852,8 +3852,8 @@
         </p:nvSpPr>
         <p:spPr>
           <a:xfrm>
-            <a:off x="320040" y="4617720"/>
-            <a:ext cx="7315200" cy="256032"/>
+            <a:off x="274320" y="4553712"/>
+            <a:ext cx="7315200" cy="237744"/>
           </a:xfrm>
           <a:prstGeom prst="rect">
             <a:avLst/>
@@ -3868,7 +3868,7 @@
           <a:p>
             <a:pPr algn="l"/>
             <a:r>
-              <a:rPr sz="1400" b="1">
+              <a:rPr sz="1300" b="1">
                 <a:solidFill>
                   <a:srgbClr val="1A1A1A"/>
                 </a:solidFill>
@@ -3888,8 +3888,8 @@
         </p:nvSpPr>
         <p:spPr>
           <a:xfrm>
-            <a:off x="320040" y="4910328"/>
-            <a:ext cx="1847088" cy="868680"/>
+            <a:off x="274320" y="4809744"/>
+            <a:ext cx="1874519" cy="960120"/>
           </a:xfrm>
           <a:prstGeom prst="rect">
             <a:avLst/>
@@ -3933,8 +3933,8 @@
         </p:nvSpPr>
         <p:spPr>
           <a:xfrm>
-            <a:off x="429768" y="4965192"/>
-            <a:ext cx="1664208" cy="201168"/>
+            <a:off x="365760" y="4864608"/>
+            <a:ext cx="1709927" cy="201168"/>
           </a:xfrm>
           <a:prstGeom prst="rect">
             <a:avLst/>
@@ -3956,7 +3956,7 @@
                 <a:latin typeface="Microsoft YaHei"/>
                 <a:ea typeface="Microsoft YaHei"/>
               </a:rPr>
-              <a:t>三季业务结果：不只是模…</a:t>
+              <a:t>不只是模型优化</a:t>
             </a:r>
           </a:p>
         </p:txBody>
@@ -3969,8 +3969,8 @@
         </p:nvSpPr>
         <p:spPr>
           <a:xfrm>
-            <a:off x="429768" y="5166360"/>
-            <a:ext cx="1664208" cy="237744"/>
+            <a:off x="365760" y="5065776"/>
+            <a:ext cx="1709927" cy="256032"/>
           </a:xfrm>
           <a:prstGeom prst="rect">
             <a:avLst/>
@@ -3992,7 +3992,7 @@
                 <a:latin typeface="Microsoft YaHei"/>
                 <a:ea typeface="Microsoft YaHei"/>
               </a:rPr>
-              <a:t>GAUC提升 &gt;2%</a:t>
+              <a:t>演讲口径</a:t>
             </a:r>
           </a:p>
         </p:txBody>
@@ -4005,8 +4005,8 @@
         </p:nvSpPr>
         <p:spPr>
           <a:xfrm>
-            <a:off x="429768" y="5413248"/>
-            <a:ext cx="1664208" cy="292608"/>
+            <a:off x="365760" y="5340096"/>
+            <a:ext cx="1709927" cy="365760"/>
           </a:xfrm>
           <a:prstGeom prst="rect">
             <a:avLst/>
@@ -4021,7 +4021,7 @@
           <a:p>
             <a:pPr algn="l"/>
             <a:r>
-              <a:rPr sz="1400" b="1">
+              <a:rPr sz="1200" b="1">
                 <a:solidFill>
                   <a:srgbClr val="8B1A2B"/>
                 </a:solidFill>
@@ -4041,8 +4041,8 @@
         </p:nvSpPr>
         <p:spPr>
           <a:xfrm>
-            <a:off x="2276856" y="4910328"/>
-            <a:ext cx="1847088" cy="868680"/>
+            <a:off x="2240279" y="4809744"/>
+            <a:ext cx="1874519" cy="960120"/>
           </a:xfrm>
           <a:prstGeom prst="rect">
             <a:avLst/>
@@ -4086,8 +4086,8 @@
         </p:nvSpPr>
         <p:spPr>
           <a:xfrm>
-            <a:off x="2386584" y="4965192"/>
-            <a:ext cx="1664208" cy="201168"/>
+            <a:off x="2331719" y="4864608"/>
+            <a:ext cx="1709927" cy="201168"/>
           </a:xfrm>
           <a:prstGeom prst="rect">
             <a:avLst/>
@@ -4109,7 +4109,7 @@
                 <a:latin typeface="Microsoft YaHei"/>
                 <a:ea typeface="Microsoft YaHei"/>
               </a:rPr>
-              <a:t>联合共建：推荐底座升级…</a:t>
+              <a:t>不只是模型优化·2</a:t>
             </a:r>
           </a:p>
         </p:txBody>
@@ -4122,8 +4122,8 @@
         </p:nvSpPr>
         <p:spPr>
           <a:xfrm>
-            <a:off x="2386584" y="5166360"/>
-            <a:ext cx="1664208" cy="237744"/>
+            <a:off x="2331719" y="5065776"/>
+            <a:ext cx="1709927" cy="256032"/>
           </a:xfrm>
           <a:prstGeom prst="rect">
             <a:avLst/>
@@ -4145,7 +4145,7 @@
                 <a:latin typeface="Microsoft YaHei"/>
                 <a:ea typeface="Microsoft YaHei"/>
               </a:rPr>
-              <a:t>长序列推理加速约4×，显存节省…</a:t>
+              <a:t>演讲口径</a:t>
             </a:r>
           </a:p>
         </p:txBody>
@@ -4158,8 +4158,8 @@
         </p:nvSpPr>
         <p:spPr>
           <a:xfrm>
-            <a:off x="2386584" y="5413248"/>
-            <a:ext cx="1664208" cy="292608"/>
+            <a:off x="2331719" y="5340096"/>
+            <a:ext cx="1709927" cy="365760"/>
           </a:xfrm>
           <a:prstGeom prst="rect">
             <a:avLst/>
@@ -4174,14 +4174,14 @@
           <a:p>
             <a:pPr algn="l"/>
             <a:r>
-              <a:rPr sz="1400" b="1">
+              <a:rPr sz="1200" b="1">
                 <a:solidFill>
                   <a:srgbClr val="8B1A2B"/>
                 </a:solidFill>
                 <a:latin typeface="Microsoft YaHei"/>
                 <a:ea typeface="Microsoft YaHei"/>
               </a:rPr>
-              <a:t>模型更新：1小时 → 分钟级</a:t>
+              <a:t>GAUC提升 &gt;2%</a:t>
             </a:r>
           </a:p>
         </p:txBody>
@@ -4194,8 +4194,8 @@
         </p:nvSpPr>
         <p:spPr>
           <a:xfrm>
-            <a:off x="4233672" y="4910328"/>
-            <a:ext cx="1847088" cy="868680"/>
+            <a:off x="4206238" y="4809744"/>
+            <a:ext cx="1874519" cy="960120"/>
           </a:xfrm>
           <a:prstGeom prst="rect">
             <a:avLst/>
@@ -4239,8 +4239,8 @@
         </p:nvSpPr>
         <p:spPr>
           <a:xfrm>
-            <a:off x="4343400" y="4965192"/>
-            <a:ext cx="1664208" cy="201168"/>
+            <a:off x="4297678" y="4864608"/>
+            <a:ext cx="1709927" cy="201168"/>
           </a:xfrm>
           <a:prstGeom prst="rect">
             <a:avLst/>
@@ -4262,7 +4262,7 @@
                 <a:latin typeface="Microsoft YaHei"/>
                 <a:ea typeface="Microsoft YaHei"/>
               </a:rPr>
-              <a:t>下一站LLM4Rec：…</a:t>
+              <a:t>不只是模型优化·3</a:t>
             </a:r>
           </a:p>
         </p:txBody>
@@ -4275,8 +4275,8 @@
         </p:nvSpPr>
         <p:spPr>
           <a:xfrm>
-            <a:off x="4343400" y="5166360"/>
-            <a:ext cx="1664208" cy="237744"/>
+            <a:off x="4297678" y="5065776"/>
+            <a:ext cx="1709927" cy="256032"/>
           </a:xfrm>
           <a:prstGeom prst="rect">
             <a:avLst/>
@@ -4298,7 +4298,7 @@
                 <a:latin typeface="Microsoft YaHei"/>
                 <a:ea typeface="Microsoft YaHei"/>
               </a:rPr>
-              <a:t>Scaling Law落地：非…</a:t>
+              <a:t>演讲口径</a:t>
             </a:r>
           </a:p>
         </p:txBody>
@@ -4311,8 +4311,8 @@
         </p:nvSpPr>
         <p:spPr>
           <a:xfrm>
-            <a:off x="4343400" y="5413248"/>
-            <a:ext cx="1664208" cy="292608"/>
+            <a:off x="4297678" y="5340096"/>
+            <a:ext cx="1709927" cy="365760"/>
           </a:xfrm>
           <a:prstGeom prst="rect">
             <a:avLst/>
@@ -4327,14 +4327,14 @@
           <a:p>
             <a:pPr algn="l"/>
             <a:r>
-              <a:rPr sz="1400" b="1">
+              <a:rPr sz="1200" b="1">
                 <a:solidFill>
                   <a:srgbClr val="8B1A2B"/>
                 </a:solidFill>
                 <a:latin typeface="Microsoft YaHei"/>
                 <a:ea typeface="Microsoft YaHei"/>
               </a:rPr>
-              <a:t>Scaling Law落地…</a:t>
+              <a:t>稠密参数提升约10×，超过1B</a:t>
             </a:r>
           </a:p>
         </p:txBody>
@@ -4347,8 +4347,8 @@
         </p:nvSpPr>
         <p:spPr>
           <a:xfrm>
-            <a:off x="6190488" y="4910328"/>
-            <a:ext cx="1847088" cy="868680"/>
+            <a:off x="6172197" y="4809744"/>
+            <a:ext cx="1874519" cy="960120"/>
           </a:xfrm>
           <a:prstGeom prst="rect">
             <a:avLst/>
@@ -4392,8 +4392,8 @@
         </p:nvSpPr>
         <p:spPr>
           <a:xfrm>
-            <a:off x="6300216" y="4965192"/>
-            <a:ext cx="1664208" cy="201168"/>
+            <a:off x="6263637" y="4864608"/>
+            <a:ext cx="1709927" cy="201168"/>
           </a:xfrm>
           <a:prstGeom prst="rect">
             <a:avLst/>
@@ -4415,7 +4415,7 @@
                 <a:latin typeface="Microsoft YaHei"/>
                 <a:ea typeface="Microsoft YaHei"/>
               </a:rPr>
-              <a:t>生成式排序UltraH…</a:t>
+              <a:t>训推切换Torch</a:t>
             </a:r>
           </a:p>
         </p:txBody>
@@ -4428,8 +4428,8 @@
         </p:nvSpPr>
         <p:spPr>
           <a:xfrm>
-            <a:off x="6300216" y="5166360"/>
-            <a:ext cx="1664208" cy="237744"/>
+            <a:off x="6263637" y="5065776"/>
+            <a:ext cx="1709927" cy="256032"/>
           </a:xfrm>
           <a:prstGeom prst="rect">
             <a:avLst/>
@@ -4451,7 +4451,7 @@
                 <a:latin typeface="Microsoft YaHei"/>
                 <a:ea typeface="Microsoft YaHei"/>
               </a:rPr>
-              <a:t>变长Attention：训练速…</a:t>
+              <a:t>演讲口径</a:t>
             </a:r>
           </a:p>
         </p:txBody>
@@ -4464,8 +4464,8 @@
         </p:nvSpPr>
         <p:spPr>
           <a:xfrm>
-            <a:off x="6300216" y="5413248"/>
-            <a:ext cx="1664208" cy="292608"/>
+            <a:off x="6263637" y="5340096"/>
+            <a:ext cx="1709927" cy="365760"/>
           </a:xfrm>
           <a:prstGeom prst="rect">
             <a:avLst/>
@@ -4480,14 +4480,14 @@
           <a:p>
             <a:pPr algn="l"/>
             <a:r>
-              <a:rPr sz="1400" b="1">
+              <a:rPr sz="1200" b="1">
                 <a:solidFill>
                   <a:srgbClr val="8B1A2B"/>
                 </a:solidFill>
                 <a:latin typeface="Microsoft YaHei"/>
                 <a:ea typeface="Microsoft YaHei"/>
               </a:rPr>
-              <a:t>训练计算优化约5–10×；推理成本…</a:t>
+              <a:t>训练迭代效率提升约8–10×；</a:t>
             </a:r>
           </a:p>
         </p:txBody>
@@ -4500,8 +4500,8 @@
         </p:nvSpPr>
         <p:spPr>
           <a:xfrm>
-            <a:off x="8147304" y="4910328"/>
-            <a:ext cx="1847088" cy="868680"/>
+            <a:off x="8138156" y="4809744"/>
+            <a:ext cx="1874519" cy="960120"/>
           </a:xfrm>
           <a:prstGeom prst="rect">
             <a:avLst/>
@@ -4545,8 +4545,8 @@
         </p:nvSpPr>
         <p:spPr>
           <a:xfrm>
-            <a:off x="8257032" y="4965192"/>
-            <a:ext cx="1664208" cy="201168"/>
+            <a:off x="8229596" y="4864608"/>
+            <a:ext cx="1709927" cy="201168"/>
           </a:xfrm>
           <a:prstGeom prst="rect">
             <a:avLst/>
@@ -4568,7 +4568,7 @@
                 <a:latin typeface="Microsoft YaHei"/>
                 <a:ea typeface="Microsoft YaHei"/>
               </a:rPr>
-              <a:t>生成式召回：稀疏ID与…</a:t>
+              <a:t>长序列</a:t>
             </a:r>
           </a:p>
         </p:txBody>
@@ -4581,8 +4581,8 @@
         </p:nvSpPr>
         <p:spPr>
           <a:xfrm>
-            <a:off x="8257032" y="5166360"/>
-            <a:ext cx="1664208" cy="237744"/>
+            <a:off x="8229596" y="5065776"/>
+            <a:ext cx="1709927" cy="256032"/>
           </a:xfrm>
           <a:prstGeom prst="rect">
             <a:avLst/>
@@ -4604,7 +4604,7 @@
                 <a:latin typeface="Microsoft YaHei"/>
                 <a:ea typeface="Microsoft YaHei"/>
               </a:rPr>
-              <a:t>Beam Attention推…</a:t>
+              <a:t>演讲口径</a:t>
             </a:r>
           </a:p>
         </p:txBody>
@@ -4617,8 +4617,8 @@
         </p:nvSpPr>
         <p:spPr>
           <a:xfrm>
-            <a:off x="8257032" y="5413248"/>
-            <a:ext cx="1664208" cy="292608"/>
+            <a:off x="8229596" y="5340096"/>
+            <a:ext cx="1709927" cy="365760"/>
           </a:xfrm>
           <a:prstGeom prst="rect">
             <a:avLst/>
@@ -4633,14 +4633,14 @@
           <a:p>
             <a:pPr algn="l"/>
             <a:r>
-              <a:rPr sz="1400" b="1">
+              <a:rPr sz="1200" b="1">
                 <a:solidFill>
                   <a:srgbClr val="8B1A2B"/>
                 </a:solidFill>
                 <a:latin typeface="Microsoft YaHei"/>
                 <a:ea typeface="Microsoft YaHei"/>
               </a:rPr>
-              <a:t>GPU前缀树约束解码性能提升约4–…</a:t>
+              <a:t>ARPU +4%、GAUC +1.5pt；</a:t>
             </a:r>
           </a:p>
         </p:txBody>
@@ -4653,8 +4653,8 @@
         </p:nvSpPr>
         <p:spPr>
           <a:xfrm>
-            <a:off x="10104120" y="4910328"/>
-            <a:ext cx="1847088" cy="868680"/>
+            <a:off x="10104115" y="4809744"/>
+            <a:ext cx="1874519" cy="960120"/>
           </a:xfrm>
           <a:prstGeom prst="rect">
             <a:avLst/>
@@ -4698,8 +4698,8 @@
         </p:nvSpPr>
         <p:spPr>
           <a:xfrm>
-            <a:off x="10213848" y="4965192"/>
-            <a:ext cx="1664208" cy="201168"/>
+            <a:off x="10195555" y="4864608"/>
+            <a:ext cx="1709927" cy="201168"/>
           </a:xfrm>
           <a:prstGeom prst="rect">
             <a:avLst/>
@@ -4721,7 +4721,7 @@
                 <a:latin typeface="Microsoft YaHei"/>
                 <a:ea typeface="Microsoft YaHei"/>
               </a:rPr>
-              <a:t>议题定位：广告系统智能…</a:t>
+              <a:t>在线学习</a:t>
             </a:r>
           </a:p>
         </p:txBody>
@@ -4734,8 +4734,8 @@
         </p:nvSpPr>
         <p:spPr>
           <a:xfrm>
-            <a:off x="10213848" y="5166360"/>
-            <a:ext cx="1664208" cy="237744"/>
+            <a:off x="10195555" y="5065776"/>
+            <a:ext cx="1709927" cy="256032"/>
           </a:xfrm>
           <a:prstGeom prst="rect">
             <a:avLst/>
@@ -4757,7 +4757,7 @@
                 <a:latin typeface="Microsoft YaHei"/>
                 <a:ea typeface="Microsoft YaHei"/>
               </a:rPr>
-              <a:t>主标题：广告系统的智能演进。</a:t>
+              <a:t>在线学习：ARPU +2%、CTR +1.8%；数据时延3小时</a:t>
             </a:r>
           </a:p>
         </p:txBody>
@@ -4770,8 +4770,8 @@
         </p:nvSpPr>
         <p:spPr>
           <a:xfrm>
-            <a:off x="10213848" y="5413248"/>
-            <a:ext cx="1664208" cy="292608"/>
+            <a:off x="10195555" y="5340096"/>
+            <a:ext cx="1709927" cy="365760"/>
           </a:xfrm>
           <a:prstGeom prst="rect">
             <a:avLst/>
@@ -4786,14 +4786,14 @@
           <a:p>
             <a:pPr algn="l"/>
             <a:r>
-              <a:rPr sz="1400" b="1">
+              <a:rPr sz="1200" b="1">
                 <a:solidFill>
                   <a:srgbClr val="8B1A2B"/>
                 </a:solidFill>
                 <a:latin typeface="Microsoft YaHei"/>
                 <a:ea typeface="Microsoft YaHei"/>
               </a:rPr>
-              <a:t>主标题：广告系统的智能演进。</a:t>
+              <a:t>20分钟，更新频率1小时→约2分钟</a:t>
             </a:r>
           </a:p>
         </p:txBody>
@@ -4806,8 +4806,8 @@
         </p:nvSpPr>
         <p:spPr>
           <a:xfrm>
-            <a:off x="0" y="5989320"/>
-            <a:ext cx="12191695" cy="868680"/>
+            <a:off x="0" y="5870448"/>
+            <a:ext cx="12191695" cy="987552"/>
           </a:xfrm>
           <a:prstGeom prst="rect">
             <a:avLst/>
@@ -4849,8 +4849,8 @@
         </p:nvSpPr>
         <p:spPr>
           <a:xfrm>
-            <a:off x="365760" y="6080760"/>
-            <a:ext cx="11430000" cy="256032"/>
+            <a:off x="320040" y="5943600"/>
+            <a:ext cx="11521440" cy="502920"/>
           </a:xfrm>
           <a:prstGeom prst="rect">
             <a:avLst/>
@@ -4865,14 +4865,14 @@
           <a:p>
             <a:pPr algn="l"/>
             <a:r>
-              <a:rPr sz="1200" b="1">
+              <a:rPr sz="1100" b="1">
                 <a:solidFill>
                   <a:srgbClr val="1A1A1A"/>
                 </a:solidFill>
                 <a:latin typeface="Microsoft YaHei"/>
                 <a:ea typeface="Microsoft YaHei"/>
               </a:rPr>
-              <a:t>可落地动作：小米路径证明：3个季度ARPU&gt;+8%的主要杠杆是Torch底座、长序列与在线学习，而非单点结构创新。；LLM4Rec落地需要生成式排序（UltraHSTU）与生成式召回（语义ID/约束解码）两侧工程同时成熟。</a:t>
+              <a:t>可落地动作：小米路径证明：3个季度ARPU&gt;+8%的主要杠杆是Torch底座、长序列与在线学习，而非单点结构创新；LLM4Rec落地需要生成式排序（UltraHSTU）与生成式召回（语义ID/约束解码）两侧工程同时成熟；友商可优先复制「显存可扩、序列可长、更新可分钟级」三项底座能力，再谈百亿参与语义生成。</a:t>
             </a:r>
           </a:p>
         </p:txBody>
@@ -4885,8 +4885,8 @@
         </p:nvSpPr>
         <p:spPr>
           <a:xfrm>
-            <a:off x="365760" y="6373368"/>
-            <a:ext cx="11430000" cy="256032"/>
+            <a:off x="320040" y="6437376"/>
+            <a:ext cx="11521440" cy="256032"/>
           </a:xfrm>
           <a:prstGeom prst="rect">
             <a:avLst/>
@@ -4901,7 +4901,7 @@
           <a:p>
             <a:pPr algn="l"/>
             <a:r>
-              <a:rPr sz="1000" b="0">
+              <a:rPr sz="900" b="0">
                 <a:solidFill>
                   <a:srgbClr val="6B6B6B"/>
                 </a:solidFill>
@@ -5143,7 +5143,7 @@
         <p:spPr>
           <a:xfrm>
             <a:off x="429768" y="1143000"/>
-            <a:ext cx="3496970" cy="292608"/>
+            <a:ext cx="3496970" cy="384048"/>
           </a:xfrm>
           <a:prstGeom prst="rect">
             <a:avLst/>
@@ -5165,7 +5165,7 @@
                 <a:latin typeface="Microsoft YaHei"/>
                 <a:ea typeface="Microsoft YaHei"/>
               </a:rPr>
-              <a:t>ARPU提升 &gt;8%</a:t>
+              <a:t>ARPU提升 &gt;8% · GAUC提升 &gt;2%</a:t>
             </a:r>
           </a:p>
         </p:txBody>
@@ -5186,7 +5186,7 @@
         </p:blipFill>
         <p:spPr>
           <a:xfrm>
-            <a:off x="429768" y="1928092"/>
+            <a:off x="429768" y="1946380"/>
             <a:ext cx="3496970" cy="2965239"/>
           </a:xfrm>
           <a:prstGeom prst="rect">
@@ -5284,7 +5284,7 @@
         <p:spPr>
           <a:xfrm>
             <a:off x="4347362" y="1143000"/>
-            <a:ext cx="3496970" cy="292608"/>
+            <a:ext cx="3496970" cy="384048"/>
           </a:xfrm>
           <a:prstGeom prst="rect">
             <a:avLst/>
@@ -5306,7 +5306,7 @@
                 <a:latin typeface="Microsoft YaHei"/>
                 <a:ea typeface="Microsoft YaHei"/>
               </a:rPr>
-              <a:t>模型更新：1小时 → 分钟级</a:t>
+              <a:t>内存节省约18%，显存节省约24% · 长序列推理加速约4×</a:t>
             </a:r>
           </a:p>
         </p:txBody>
@@ -5327,7 +5327,7 @@
         </p:blipFill>
         <p:spPr>
           <a:xfrm>
-            <a:off x="4347362" y="1928092"/>
+            <a:off x="4347362" y="1946380"/>
             <a:ext cx="3496970" cy="2965239"/>
           </a:xfrm>
           <a:prstGeom prst="rect">
@@ -5425,7 +5425,7 @@
         <p:spPr>
           <a:xfrm>
             <a:off x="8264956" y="1143000"/>
-            <a:ext cx="3496970" cy="292608"/>
+            <a:ext cx="3496970" cy="384048"/>
           </a:xfrm>
           <a:prstGeom prst="rect">
             <a:avLst/>
@@ -5447,7 +5447,7 @@
                 <a:latin typeface="Microsoft YaHei"/>
                 <a:ea typeface="Microsoft YaHei"/>
               </a:rPr>
-              <a:t>下一站LLM4Rec：Scaling …</a:t>
+              <a:t>下一站LLM4Rec</a:t>
             </a:r>
           </a:p>
         </p:txBody>
@@ -5468,7 +5468,7 @@
         </p:blipFill>
         <p:spPr>
           <a:xfrm>
-            <a:off x="8264956" y="1928092"/>
+            <a:off x="8264956" y="1946380"/>
             <a:ext cx="3496970" cy="2965239"/>
           </a:xfrm>
           <a:prstGeom prst="rect">
@@ -5507,7 +5507,7 @@
                 <a:latin typeface="Microsoft YaHei"/>
                 <a:ea typeface="Microsoft YaHei"/>
               </a:rPr>
-              <a:t>下一站LLM4Rec：Scaling Law / 超长…</a:t>
+              <a:t>下一站LLM4Rec：Scaling Law / 超长序列 / 多模语义</a:t>
             </a:r>
           </a:p>
         </p:txBody>

--- a/yunqi-2026-pai-forum/docs/洞察一页-07-广告系统的智能演进：小米广告算法走向LLM4Rec的实践.pptx
+++ b/yunqi-2026-pai-forum/docs/洞察一页-07-广告系统的智能演进：小米广告算法走向LLM4Rec的实践.pptx
@@ -3323,7 +3323,7 @@
                 <a:latin typeface="Microsoft YaHei"/>
                 <a:ea typeface="Microsoft YaHei"/>
               </a:rPr>
-              <a:t>一句话判断：吴睿泽分享小米应用商店广告在约3个季度内通过底座升级而非单纯调模，实现ARPU提升超过8个百分点的实践。路径是训推全面切Torch、端到端长序列、流式在线学习，并推进推荐Scaling Law与生成式Ultra-HSTU。</a:t>
+              <a:t>一句话判断：小米广告算法走向LLM4Rec的实践与思考——百分点的实践。路径是训推全面切Torch、端到端长序列、流式在线学习，并推进推荐Scaling Law与生成式Ultra-HSTU。</a:t>
             </a:r>
           </a:p>
         </p:txBody>
@@ -3956,7 +3956,7 @@
                 <a:latin typeface="Microsoft YaHei"/>
                 <a:ea typeface="Microsoft YaHei"/>
               </a:rPr>
-              <a:t>不只是模型优化</a:t>
+              <a:t>ARPU提升 &gt;</a:t>
             </a:r>
           </a:p>
         </p:txBody>
@@ -3992,7 +3992,7 @@
                 <a:latin typeface="Microsoft YaHei"/>
                 <a:ea typeface="Microsoft YaHei"/>
               </a:rPr>
-              <a:t>演讲口径</a:t>
+              <a:t>不只是模型优化</a:t>
             </a:r>
           </a:p>
         </p:txBody>
@@ -4028,7 +4028,7 @@
                 <a:latin typeface="Microsoft YaHei"/>
                 <a:ea typeface="Microsoft YaHei"/>
               </a:rPr>
-              <a:t>ARPU提升 &gt;8%</a:t>
+              <a:t>8%</a:t>
             </a:r>
           </a:p>
         </p:txBody>
@@ -4109,7 +4109,7 @@
                 <a:latin typeface="Microsoft YaHei"/>
                 <a:ea typeface="Microsoft YaHei"/>
               </a:rPr>
-              <a:t>不只是模型优化·2</a:t>
+              <a:t>GAUC提升 &gt;</a:t>
             </a:r>
           </a:p>
         </p:txBody>
@@ -4145,7 +4145,7 @@
                 <a:latin typeface="Microsoft YaHei"/>
                 <a:ea typeface="Microsoft YaHei"/>
               </a:rPr>
-              <a:t>演讲口径</a:t>
+              <a:t>不只是模型优化</a:t>
             </a:r>
           </a:p>
         </p:txBody>
@@ -4181,7 +4181,7 @@
                 <a:latin typeface="Microsoft YaHei"/>
                 <a:ea typeface="Microsoft YaHei"/>
               </a:rPr>
-              <a:t>GAUC提升 &gt;2%</a:t>
+              <a:t>2%</a:t>
             </a:r>
           </a:p>
         </p:txBody>
@@ -4262,7 +4262,7 @@
                 <a:latin typeface="Microsoft YaHei"/>
                 <a:ea typeface="Microsoft YaHei"/>
               </a:rPr>
-              <a:t>不只是模型优化·3</a:t>
+              <a:t>不只是模型优化</a:t>
             </a:r>
           </a:p>
         </p:txBody>
@@ -4298,7 +4298,7 @@
                 <a:latin typeface="Microsoft YaHei"/>
                 <a:ea typeface="Microsoft YaHei"/>
               </a:rPr>
-              <a:t>演讲口径</a:t>
+              <a:t>关键能力</a:t>
             </a:r>
           </a:p>
         </p:txBody>
@@ -4415,7 +4415,7 @@
                 <a:latin typeface="Microsoft YaHei"/>
                 <a:ea typeface="Microsoft YaHei"/>
               </a:rPr>
-              <a:t>训推切换Torch</a:t>
+              <a:t>联合共建</a:t>
             </a:r>
           </a:p>
         </p:txBody>
@@ -4451,7 +4451,7 @@
                 <a:latin typeface="Microsoft YaHei"/>
                 <a:ea typeface="Microsoft YaHei"/>
               </a:rPr>
-              <a:t>演讲口径</a:t>
+              <a:t>数据时延：3小时</a:t>
             </a:r>
           </a:p>
         </p:txBody>
@@ -4487,7 +4487,7 @@
                 <a:latin typeface="Microsoft YaHei"/>
                 <a:ea typeface="Microsoft YaHei"/>
               </a:rPr>
-              <a:t>训练迭代效率提升约8–10×；</a:t>
+              <a:t>20分钟</a:t>
             </a:r>
           </a:p>
         </p:txBody>
@@ -4568,7 +4568,7 @@
                 <a:latin typeface="Microsoft YaHei"/>
                 <a:ea typeface="Microsoft YaHei"/>
               </a:rPr>
-              <a:t>长序列</a:t>
+              <a:t>内存节省约18%，显存节省</a:t>
             </a:r>
           </a:p>
         </p:txBody>
@@ -4604,7 +4604,7 @@
                 <a:latin typeface="Microsoft YaHei"/>
                 <a:ea typeface="Microsoft YaHei"/>
               </a:rPr>
-              <a:t>演讲口径</a:t>
+              <a:t>联合共建</a:t>
             </a:r>
           </a:p>
         </p:txBody>
@@ -4640,7 +4640,7 @@
                 <a:latin typeface="Microsoft YaHei"/>
                 <a:ea typeface="Microsoft YaHei"/>
               </a:rPr>
-              <a:t>ARPU +4%、GAUC +1.5pt；</a:t>
+              <a:t>约24%</a:t>
             </a:r>
           </a:p>
         </p:txBody>
@@ -4721,7 +4721,7 @@
                 <a:latin typeface="Microsoft YaHei"/>
                 <a:ea typeface="Microsoft YaHei"/>
               </a:rPr>
-              <a:t>在线学习</a:t>
+              <a:t>长序列推理加速约4×，显存节省</a:t>
             </a:r>
           </a:p>
         </p:txBody>
@@ -4757,7 +4757,7 @@
                 <a:latin typeface="Microsoft YaHei"/>
                 <a:ea typeface="Microsoft YaHei"/>
               </a:rPr>
-              <a:t>在线学习：ARPU +2%、CTR +1.8%；数据时延3小时</a:t>
+              <a:t>联合共建</a:t>
             </a:r>
           </a:p>
         </p:txBody>
@@ -4793,7 +4793,7 @@
                 <a:latin typeface="Microsoft YaHei"/>
                 <a:ea typeface="Microsoft YaHei"/>
               </a:rPr>
-              <a:t>20分钟，更新频率1小时→约2分钟</a:t>
+              <a:t>约58%</a:t>
             </a:r>
           </a:p>
         </p:txBody>
@@ -4872,7 +4872,7 @@
                 <a:latin typeface="Microsoft YaHei"/>
                 <a:ea typeface="Microsoft YaHei"/>
               </a:rPr>
-              <a:t>可落地动作：小米路径证明：3个季度ARPU&gt;+8%的主要杠杆是Torch底座、长序列与在线学习，而非单点结构创新；LLM4Rec落地需要生成式排序（UltraHSTU）与生成式召回（语义ID/约束解码）两侧工程同时成熟；友商可优先复制「显存可扩、序列可长、更新可分钟级」三项底座能力，再谈百亿参与语义生成。</a:t>
+              <a:t>启示要点：小米路径证明：3个季度ARPU&gt;+8%的主要杠杆是Torch底座、长序列与在线学习，而非单点结构创新；LLM4Rec落地需要生成式排序（UltraHSTU）与生成式召回（语义ID/约束解码）两侧工程同时成熟；友商可优先复制「显存可扩、序列可长、更新可分钟级」三项底座能力，再谈百亿参与语义生成。</a:t>
             </a:r>
           </a:p>
         </p:txBody>

--- a/yunqi-2026-pai-forum/docs/洞察一页-07-广告系统的智能演进：小米广告算法走向LLM4Rec的实践.pptx
+++ b/yunqi-2026-pai-forum/docs/洞察一页-07-广告系统的智能演进：小米广告算法走向LLM4Rec的实践.pptx
@@ -4872,7 +4872,7 @@
                 <a:latin typeface="Microsoft YaHei"/>
                 <a:ea typeface="Microsoft YaHei"/>
               </a:rPr>
-              <a:t>启示要点：小米路径证明：3个季度ARPU&gt;+8%的主要杠杆是Torch底座、长序列与在线学习，而非单点结构创新；LLM4Rec落地需要生成式排序（UltraHSTU）与生成式召回（语义ID/约束解码）两侧工程同时成熟；友商可优先复制「显存可扩、序列可长、更新可分钟级」三项底座能力，再谈百亿参与语义生成。</a:t>
+              <a:t>启示要点：小米路径证明：3个季度ARPU&gt;+8%的主要杠杆是Torch底座、长序列与在线学习，而非单点结构创新；LLM4Rec落地需要生成式排序（UltraHSTU）与生成式召回（语义ID/约束解码）两侧工程同时成熟；</a:t>
             </a:r>
           </a:p>
         </p:txBody>

--- a/yunqi-2026-pai-forum/docs/洞察一页-07-广告系统的智能演进：小米广告算法走向LLM4Rec的实践.pptx
+++ b/yunqi-2026-pai-forum/docs/洞察一页-07-广告系统的智能演进：小米广告算法走向LLM4Rec的实践.pptx
@@ -4872,7 +4872,7 @@
                 <a:latin typeface="Microsoft YaHei"/>
                 <a:ea typeface="Microsoft YaHei"/>
               </a:rPr>
-              <a:t>启示要点：小米路径证明：3个季度ARPU&gt;+8%的主要杠杆是Torch底座、长序列与在线学习，而非单点结构创新；LLM4Rec落地需要生成式排序（UltraHSTU）与生成式召回（语义ID/约束解码）两侧工程同时成熟；</a:t>
+              <a:t>启示要点：小米路径证明：3个季度ARPU&gt;+8%的主要杠杆是Torch底座、长序列与在线学习，而非单点结构创新；LLM4Rec落地需要生成式排序（UltraHSTU）与生成式召回（语义ID/约束解码）两侧工程同时成熟。</a:t>
             </a:r>
           </a:p>
         </p:txBody>
